--- a/assets/powerpoints/module-sante/B2-l-heure-du-rendez-vous.pptx
+++ b/assets/powerpoints/module-sante/B2-l-heure-du-rendez-vous.pptx
@@ -18,6 +18,7 @@
     <p:sldId id="266" r:id="rId18"/>
     <p:sldId id="267" r:id="rId19"/>
     <p:sldId id="268" r:id="rId20"/>
+    <p:sldId id="269" r:id="rId21"/>
   </p:sldIdLst>
   <p:sldSz cx="12191695" cy="6858000" type="screen4x3"/>
   <p:notesSz cx="6858000" cy="9144000"/>
@@ -584,7 +585,7 @@
           <a:lstStyle/>
           <a:p>
             <a:r>
-              <a:t>Faire dire la reformulation avec l'intonation montante de la question. C'est ce qui la rend polie plutôt que sèche.</a:t>
+              <a:t>La troisième est la plus efficace et la moins pratiquée. Insister : reformuler prouve qu'on a compris et corrige l'erreur du même coup.</a:t>
             </a:r>
           </a:p>
         </p:txBody>
@@ -654,7 +655,7 @@
           <a:lstStyle/>
           <a:p>
             <a:r>
-              <a:t>Corriger en groupe. Donner la bonne réponse, sans revenir sur qui s'est trompé.</a:t>
+              <a:t>Faire dire la reformulation avec l'intonation montante de la question. C'est ce qui la rend polie plutôt que sèche.</a:t>
             </a:r>
           </a:p>
         </p:txBody>
@@ -724,7 +725,7 @@
           <a:lstStyle/>
           <a:p>
             <a:r>
-              <a:t>Vingt minutes, dos à dos : sans les gestes et les lèvres, l'écoute travaille vraiment. C'est le meilleur moment de la séance.</a:t>
+              <a:t>Corriger en groupe. Donner la bonne réponse, sans revenir sur qui s'est trompé.</a:t>
             </a:r>
           </a:p>
         </p:txBody>
@@ -794,6 +795,76 @@
           <a:lstStyle/>
           <a:p>
             <a:r>
+              <a:t>Vingt minutes, dos à dos : sans les gestes et les lèvres, l'écoute travaille vraiment. C'est le meilleur moment de la séance.</a:t>
+            </a:r>
+          </a:p>
+        </p:txBody>
+      </p:sp>
+      <p:sp>
+        <p:nvSpPr>
+          <p:cNvPr id="4" name="Slide Number Placeholder 3"/>
+          <p:cNvSpPr>
+            <a:spLocks noGrp="1"/>
+          </p:cNvSpPr>
+          <p:nvPr>
+            <p:ph type="sldNum" idx="5" sz="quarter"/>
+          </p:nvPr>
+        </p:nvSpPr>
+        <p:spPr/>
+      </p:sp>
+    </p:spTree>
+  </p:cSld>
+  <p:clrMapOvr>
+    <a:masterClrMapping/>
+  </p:clrMapOvr>
+</p:notes>
+</file>
+
+<file path=ppt/notesSlides/notesSlide14.xml><?xml version="1.0" encoding="utf-8"?>
+<p:notes xmlns:a="http://schemas.openxmlformats.org/drawingml/2006/main" xmlns:p="http://schemas.openxmlformats.org/presentationml/2006/main" xmlns:r="http://schemas.openxmlformats.org/officeDocument/2006/relationships">
+  <p:cSld>
+    <p:spTree>
+      <p:nvGrpSpPr>
+        <p:cNvPr id="1" name=""/>
+        <p:cNvGrpSpPr/>
+        <p:nvPr/>
+      </p:nvGrpSpPr>
+      <p:grpSpPr>
+        <a:xfrm>
+          <a:off x="0" y="0"/>
+          <a:ext cx="0" cy="0"/>
+          <a:chOff x="0" y="0"/>
+          <a:chExt cx="0" cy="0"/>
+        </a:xfrm>
+      </p:grpSpPr>
+      <p:sp>
+        <p:nvSpPr>
+          <p:cNvPr id="2" name="Slide Image Placeholder 1"/>
+          <p:cNvSpPr>
+            <a:spLocks noGrp="1"/>
+          </p:cNvSpPr>
+          <p:nvPr>
+            <p:ph type="sldImg" idx="2"/>
+          </p:nvPr>
+        </p:nvSpPr>
+        <p:spPr/>
+      </p:sp>
+      <p:sp>
+        <p:nvSpPr>
+          <p:cNvPr id="3" name="Notes Placeholder 2"/>
+          <p:cNvSpPr>
+            <a:spLocks noGrp="1"/>
+          </p:cNvSpPr>
+          <p:nvPr>
+            <p:ph type="body" idx="3" sz="quarter"/>
+          </p:nvPr>
+        </p:nvSpPr>
+        <p:spPr/>
+        <p:txBody>
+          <a:bodyPr/>
+          <a:lstStyle/>
+          <a:p>
+            <a:r>
               <a:t>Ramasser. Ces disponibilités rendent l'appel enregistré de E1 réaliste : l'élève aura une vraie réponse à donner.</a:t>
             </a:r>
           </a:p>
@@ -1354,7 +1425,7 @@
           <a:lstStyle/>
           <a:p>
             <a:r>
-              <a:t>La troisième est la plus efficace et la moins pratiquée. Insister : reformuler prouve qu'on a compris et corrige l'erreur du même coup.</a:t>
+              <a:t>Projeter avant d'ouvrir l'activité. Faire dire à deux ou trois élèves où irait la première réponse, sans y toucher : on vérifie qu'ils ont compris la consigne, pas le contenu. Ouvrir ensuite le module sur les postes.</a:t>
             </a:r>
           </a:p>
         </p:txBody>
@@ -4776,7 +4847,7 @@
                 </a:solidFill>
                 <a:latin typeface="Verdana"/>
               </a:rPr>
-              <a:t>PRATIQUE · 3 DE 4</a:t>
+              <a:t>ANALYSE</a:t>
             </a:r>
           </a:p>
         </p:txBody>
@@ -4815,64 +4886,25 @@
                 </a:solidFill>
                 <a:latin typeface="Verdana"/>
               </a:rPr>
-              <a:t>Confirmez le rendez-vous</a:t>
-            </a:r>
-          </a:p>
-        </p:txBody>
-      </p:sp>
-      <p:sp>
-        <p:nvSpPr>
-          <p:cNvPr id="7" name="TextBox 6"/>
-          <p:cNvSpPr txBox="1"/>
-          <p:nvPr/>
-        </p:nvSpPr>
-        <p:spPr>
-          <a:xfrm>
-            <a:off x="566928" y="1645920"/>
-            <a:ext cx="11057839" cy="329184"/>
-          </a:xfrm>
-          <a:prstGeom prst="rect">
-            <a:avLst/>
-          </a:prstGeom>
-          <a:noFill/>
-        </p:spPr>
-        <p:txBody>
-          <a:bodyPr wrap="square" lIns="0" rIns="0" tIns="0" bIns="0" anchor="t">
-            <a:spAutoFit/>
-          </a:bodyPr>
-          <a:lstStyle/>
-          <a:p>
-            <a:pPr algn="l">
-              <a:lnSpc>
-                <a:spcPct val="135000"/>
-              </a:lnSpc>
-            </a:pPr>
-            <a:r>
-              <a:rPr sz="1800" b="0" i="0">
-                <a:solidFill>
-                  <a:srgbClr val="6E7175"/>
-                </a:solidFill>
-                <a:latin typeface="Verdana"/>
-              </a:rPr>
-              <a:t>Reformulez pour vérifier.</a:t>
-            </a:r>
-          </a:p>
-        </p:txBody>
-      </p:sp>
-      <p:sp>
-        <p:nvSpPr>
-          <p:cNvPr id="8" name="Rounded Rectangle 7"/>
+              <a:t>Faire répéter, poliment</a:t>
+            </a:r>
+          </a:p>
+        </p:txBody>
+      </p:sp>
+      <p:sp>
+        <p:nvSpPr>
+          <p:cNvPr id="7" name="Rounded Rectangle 6"/>
           <p:cNvSpPr/>
           <p:nvPr/>
         </p:nvSpPr>
         <p:spPr>
           <a:xfrm>
-            <a:off x="566928" y="2139696"/>
-            <a:ext cx="11057839" cy="986535"/>
+            <a:off x="566928" y="1810512"/>
+            <a:ext cx="5446623" cy="2052828"/>
           </a:xfrm>
           <a:prstGeom prst="roundRect">
             <a:avLst>
-              <a:gd name="adj" fmla="val 14830"/>
+              <a:gd name="adj" fmla="val 7126"/>
             </a:avLst>
           </a:prstGeom>
           <a:solidFill>
@@ -4907,58 +4939,14 @@
       </p:sp>
       <p:sp>
         <p:nvSpPr>
-          <p:cNvPr id="9" name="Rounded Rectangle 8"/>
-          <p:cNvSpPr/>
-          <p:nvPr/>
-        </p:nvSpPr>
-        <p:spPr>
-          <a:xfrm>
-            <a:off x="841247" y="2450083"/>
-            <a:ext cx="365760" cy="365760"/>
-          </a:xfrm>
-          <a:prstGeom prst="roundRect">
-            <a:avLst>
-              <a:gd name="adj" fmla="val 32500"/>
-            </a:avLst>
-          </a:prstGeom>
-          <a:solidFill>
-            <a:srgbClr val="DCF2EF"/>
-          </a:solidFill>
-          <a:ln>
-            <a:noFill/>
-          </a:ln>
-          <a:effectLst/>
-        </p:spPr>
-        <p:style>
-          <a:lnRef idx="1">
-            <a:schemeClr val="accent1"/>
-          </a:lnRef>
-          <a:fillRef idx="3">
-            <a:schemeClr val="accent1"/>
-          </a:fillRef>
-          <a:effectRef idx="2">
-            <a:schemeClr val="accent1"/>
-          </a:effectRef>
-          <a:fontRef idx="minor">
-            <a:schemeClr val="lt1"/>
-          </a:fontRef>
-        </p:style>
-        <p:txBody>
-          <a:bodyPr rtlCol="0" anchor="ctr"/>
-          <a:lstStyle/>
-          <a:p/>
-        </p:txBody>
-      </p:sp>
-      <p:sp>
-        <p:nvSpPr>
-          <p:cNvPr id="10" name="TextBox 9"/>
+          <p:cNvPr id="8" name="TextBox 7"/>
           <p:cNvSpPr txBox="1"/>
           <p:nvPr/>
         </p:nvSpPr>
         <p:spPr>
           <a:xfrm>
-            <a:off x="841247" y="2514091"/>
-            <a:ext cx="365760" cy="256032"/>
+            <a:off x="886968" y="2084831"/>
+            <a:ext cx="4806543" cy="387096"/>
           </a:xfrm>
           <a:prstGeom prst="rect">
             <a:avLst/>
@@ -4971,33 +4959,33 @@
           </a:bodyPr>
           <a:lstStyle/>
           <a:p>
-            <a:pPr algn="ctr">
+            <a:pPr algn="l">
               <a:lnSpc>
-                <a:spcPct val="135000"/>
+                <a:spcPct val="118000"/>
               </a:lnSpc>
             </a:pPr>
             <a:r>
-              <a:rPr sz="1500" b="1" i="0">
+              <a:rPr sz="2400" b="1" i="0">
                 <a:solidFill>
                   <a:srgbClr val="0D7A6F"/>
                 </a:solidFill>
                 <a:latin typeface="Verdana"/>
               </a:rPr>
-              <a:t>1</a:t>
-            </a:r>
-          </a:p>
-        </p:txBody>
-      </p:sp>
-      <p:sp>
-        <p:nvSpPr>
-          <p:cNvPr id="11" name="TextBox 10"/>
+              <a:t>Demander de répéter</a:t>
+            </a:r>
+          </a:p>
+        </p:txBody>
+      </p:sp>
+      <p:sp>
+        <p:nvSpPr>
+          <p:cNvPr id="9" name="TextBox 8"/>
           <p:cNvSpPr txBox="1"/>
           <p:nvPr/>
         </p:nvSpPr>
         <p:spPr>
           <a:xfrm>
-            <a:off x="1344168" y="2295144"/>
-            <a:ext cx="10097719" cy="712215"/>
+            <a:off x="886968" y="2499360"/>
+            <a:ext cx="4806543" cy="1089660"/>
           </a:xfrm>
           <a:prstGeom prst="rect">
             <a:avLst/>
@@ -5012,35 +5000,35 @@
           <a:p>
             <a:pPr algn="l">
               <a:lnSpc>
-                <a:spcPct val="140000"/>
+                <a:spcPct val="142000"/>
               </a:lnSpc>
             </a:pPr>
             <a:r>
-              <a:rPr sz="1900" b="0" i="0">
+              <a:rPr sz="1800" b="0" i="0">
                 <a:solidFill>
                   <a:srgbClr val="3A3D40"/>
                 </a:solidFill>
                 <a:latin typeface="Verdana"/>
               </a:rPr>
-              <a:t>« Le docteur Tremblay est libre jeudi à onze heures. »</a:t>
-            </a:r>
-          </a:p>
-        </p:txBody>
-      </p:sp>
-      <p:sp>
-        <p:nvSpPr>
-          <p:cNvPr id="12" name="Rounded Rectangle 11"/>
+              <a:t>« Pardon, pouvez-vous répéter, s'il vous plaît ? » La formule passe partout, au téléphone comme au comptoir.</a:t>
+            </a:r>
+          </a:p>
+        </p:txBody>
+      </p:sp>
+      <p:sp>
+        <p:nvSpPr>
+          <p:cNvPr id="10" name="Rounded Rectangle 9"/>
           <p:cNvSpPr/>
           <p:nvPr/>
         </p:nvSpPr>
         <p:spPr>
           <a:xfrm>
-            <a:off x="566928" y="3254248"/>
-            <a:ext cx="11057839" cy="986535"/>
+            <a:off x="6178143" y="1810512"/>
+            <a:ext cx="5446623" cy="2052828"/>
           </a:xfrm>
           <a:prstGeom prst="roundRect">
             <a:avLst>
-              <a:gd name="adj" fmla="val 14830"/>
+              <a:gd name="adj" fmla="val 7126"/>
             </a:avLst>
           </a:prstGeom>
           <a:solidFill>
@@ -5075,58 +5063,14 @@
       </p:sp>
       <p:sp>
         <p:nvSpPr>
-          <p:cNvPr id="13" name="Rounded Rectangle 12"/>
-          <p:cNvSpPr/>
-          <p:nvPr/>
-        </p:nvSpPr>
-        <p:spPr>
-          <a:xfrm>
-            <a:off x="841247" y="3564635"/>
-            <a:ext cx="365760" cy="365760"/>
-          </a:xfrm>
-          <a:prstGeom prst="roundRect">
-            <a:avLst>
-              <a:gd name="adj" fmla="val 32500"/>
-            </a:avLst>
-          </a:prstGeom>
-          <a:solidFill>
-            <a:srgbClr val="DCF2EF"/>
-          </a:solidFill>
-          <a:ln>
-            <a:noFill/>
-          </a:ln>
-          <a:effectLst/>
-        </p:spPr>
-        <p:style>
-          <a:lnRef idx="1">
-            <a:schemeClr val="accent1"/>
-          </a:lnRef>
-          <a:fillRef idx="3">
-            <a:schemeClr val="accent1"/>
-          </a:fillRef>
-          <a:effectRef idx="2">
-            <a:schemeClr val="accent1"/>
-          </a:effectRef>
-          <a:fontRef idx="minor">
-            <a:schemeClr val="lt1"/>
-          </a:fontRef>
-        </p:style>
-        <p:txBody>
-          <a:bodyPr rtlCol="0" anchor="ctr"/>
-          <a:lstStyle/>
-          <a:p/>
-        </p:txBody>
-      </p:sp>
-      <p:sp>
-        <p:nvSpPr>
-          <p:cNvPr id="14" name="TextBox 13"/>
+          <p:cNvPr id="11" name="TextBox 10"/>
           <p:cNvSpPr txBox="1"/>
           <p:nvPr/>
         </p:nvSpPr>
         <p:spPr>
           <a:xfrm>
-            <a:off x="841247" y="3628643"/>
-            <a:ext cx="365760" cy="256032"/>
+            <a:off x="6498183" y="2084831"/>
+            <a:ext cx="4806543" cy="387096"/>
           </a:xfrm>
           <a:prstGeom prst="rect">
             <a:avLst/>
@@ -5139,33 +5083,33 @@
           </a:bodyPr>
           <a:lstStyle/>
           <a:p>
-            <a:pPr algn="ctr">
+            <a:pPr algn="l">
               <a:lnSpc>
-                <a:spcPct val="135000"/>
+                <a:spcPct val="118000"/>
               </a:lnSpc>
             </a:pPr>
             <a:r>
-              <a:rPr sz="1500" b="1" i="0">
+              <a:rPr sz="2400" b="1" i="0">
                 <a:solidFill>
                   <a:srgbClr val="0D7A6F"/>
                 </a:solidFill>
                 <a:latin typeface="Verdana"/>
               </a:rPr>
-              <a:t>2</a:t>
-            </a:r>
-          </a:p>
-        </p:txBody>
-      </p:sp>
-      <p:sp>
-        <p:nvSpPr>
-          <p:cNvPr id="15" name="TextBox 14"/>
+              <a:t>Demander plus lentement</a:t>
+            </a:r>
+          </a:p>
+        </p:txBody>
+      </p:sp>
+      <p:sp>
+        <p:nvSpPr>
+          <p:cNvPr id="12" name="TextBox 11"/>
           <p:cNvSpPr txBox="1"/>
           <p:nvPr/>
         </p:nvSpPr>
         <p:spPr>
           <a:xfrm>
-            <a:off x="1344168" y="3409696"/>
-            <a:ext cx="10097719" cy="712215"/>
+            <a:off x="6498183" y="2499360"/>
+            <a:ext cx="4806543" cy="1089660"/>
           </a:xfrm>
           <a:prstGeom prst="rect">
             <a:avLst/>
@@ -5180,35 +5124,35 @@
           <a:p>
             <a:pPr algn="l">
               <a:lnSpc>
-                <a:spcPct val="140000"/>
+                <a:spcPct val="142000"/>
               </a:lnSpc>
             </a:pPr>
             <a:r>
-              <a:rPr sz="1900" b="0" i="0">
+              <a:rPr sz="1800" b="0" i="0">
                 <a:solidFill>
                   <a:srgbClr val="3A3D40"/>
                 </a:solidFill>
                 <a:latin typeface="Verdana"/>
               </a:rPr>
-              <a:t>« On vous attend mardi à quatorze heures trente. »</a:t>
-            </a:r>
-          </a:p>
-        </p:txBody>
-      </p:sp>
-      <p:sp>
-        <p:nvSpPr>
-          <p:cNvPr id="16" name="Rounded Rectangle 15"/>
+              <a:t>« Est-ce que vous pouvez parler un peu plus lentement ? » On peut le demander sans s'excuser longuement.</a:t>
+            </a:r>
+          </a:p>
+        </p:txBody>
+      </p:sp>
+      <p:sp>
+        <p:nvSpPr>
+          <p:cNvPr id="13" name="Rounded Rectangle 12"/>
           <p:cNvSpPr/>
           <p:nvPr/>
         </p:nvSpPr>
         <p:spPr>
           <a:xfrm>
-            <a:off x="566928" y="4368800"/>
-            <a:ext cx="11057839" cy="648716"/>
+            <a:off x="566928" y="4027932"/>
+            <a:ext cx="5446623" cy="2052828"/>
           </a:xfrm>
           <a:prstGeom prst="roundRect">
             <a:avLst>
-              <a:gd name="adj" fmla="val 22552"/>
+              <a:gd name="adj" fmla="val 7126"/>
             </a:avLst>
           </a:prstGeom>
           <a:solidFill>
@@ -5243,25 +5187,105 @@
       </p:sp>
       <p:sp>
         <p:nvSpPr>
-          <p:cNvPr id="17" name="Rounded Rectangle 16"/>
+          <p:cNvPr id="14" name="TextBox 13"/>
+          <p:cNvSpPr txBox="1"/>
+          <p:nvPr/>
+        </p:nvSpPr>
+        <p:spPr>
+          <a:xfrm>
+            <a:off x="886968" y="4302252"/>
+            <a:ext cx="4806543" cy="387096"/>
+          </a:xfrm>
+          <a:prstGeom prst="rect">
+            <a:avLst/>
+          </a:prstGeom>
+          <a:noFill/>
+        </p:spPr>
+        <p:txBody>
+          <a:bodyPr wrap="square" lIns="0" rIns="0" tIns="0" bIns="0" anchor="t">
+            <a:spAutoFit/>
+          </a:bodyPr>
+          <a:lstStyle/>
+          <a:p>
+            <a:pPr algn="l">
+              <a:lnSpc>
+                <a:spcPct val="118000"/>
+              </a:lnSpc>
+            </a:pPr>
+            <a:r>
+              <a:rPr sz="2400" b="1" i="0">
+                <a:solidFill>
+                  <a:srgbClr val="0D7A6F"/>
+                </a:solidFill>
+                <a:latin typeface="Verdana"/>
+              </a:rPr>
+              <a:t>Vérifier ce qu'on a compris</a:t>
+            </a:r>
+          </a:p>
+        </p:txBody>
+      </p:sp>
+      <p:sp>
+        <p:nvSpPr>
+          <p:cNvPr id="15" name="TextBox 14"/>
+          <p:cNvSpPr txBox="1"/>
+          <p:nvPr/>
+        </p:nvSpPr>
+        <p:spPr>
+          <a:xfrm>
+            <a:off x="886968" y="4716780"/>
+            <a:ext cx="4806543" cy="1089660"/>
+          </a:xfrm>
+          <a:prstGeom prst="rect">
+            <a:avLst/>
+          </a:prstGeom>
+          <a:noFill/>
+        </p:spPr>
+        <p:txBody>
+          <a:bodyPr wrap="square" lIns="0" rIns="0" tIns="0" bIns="0" anchor="t">
+            <a:spAutoFit/>
+          </a:bodyPr>
+          <a:lstStyle/>
+          <a:p>
+            <a:pPr algn="l">
+              <a:lnSpc>
+                <a:spcPct val="142000"/>
+              </a:lnSpc>
+            </a:pPr>
+            <a:r>
+              <a:rPr sz="1800" b="0" i="0">
+                <a:solidFill>
+                  <a:srgbClr val="3A3D40"/>
+                </a:solidFill>
+                <a:latin typeface="Verdana"/>
+              </a:rPr>
+              <a:t>« Donc c'est bien jeudi à onze heures ? » La meilleure des trois : elle confirme au lieu de redemander.</a:t>
+            </a:r>
+          </a:p>
+        </p:txBody>
+      </p:sp>
+      <p:sp>
+        <p:nvSpPr>
+          <p:cNvPr id="16" name="Rounded Rectangle 15"/>
           <p:cNvSpPr/>
           <p:nvPr/>
         </p:nvSpPr>
         <p:spPr>
           <a:xfrm>
-            <a:off x="841247" y="4510278"/>
-            <a:ext cx="365760" cy="365760"/>
+            <a:off x="6178143" y="4027932"/>
+            <a:ext cx="5446623" cy="2052828"/>
           </a:xfrm>
           <a:prstGeom prst="roundRect">
             <a:avLst>
-              <a:gd name="adj" fmla="val 32500"/>
+              <a:gd name="adj" fmla="val 7126"/>
             </a:avLst>
           </a:prstGeom>
           <a:solidFill>
-            <a:srgbClr val="DCF2EF"/>
+            <a:srgbClr val="FFFFFF"/>
           </a:solidFill>
-          <a:ln>
-            <a:noFill/>
+          <a:ln w="12700">
+            <a:solidFill>
+              <a:srgbClr val="EAEAE8"/>
+            </a:solidFill>
           </a:ln>
           <a:effectLst/>
         </p:spPr>
@@ -5287,14 +5311,14 @@
       </p:sp>
       <p:sp>
         <p:nvSpPr>
-          <p:cNvPr id="18" name="TextBox 17"/>
+          <p:cNvPr id="17" name="TextBox 16"/>
           <p:cNvSpPr txBox="1"/>
           <p:nvPr/>
         </p:nvSpPr>
         <p:spPr>
           <a:xfrm>
-            <a:off x="841247" y="4574286"/>
-            <a:ext cx="365760" cy="256032"/>
+            <a:off x="6498183" y="4302252"/>
+            <a:ext cx="4806543" cy="387096"/>
           </a:xfrm>
           <a:prstGeom prst="rect">
             <a:avLst/>
@@ -5307,33 +5331,33 @@
           </a:bodyPr>
           <a:lstStyle/>
           <a:p>
-            <a:pPr algn="ctr">
+            <a:pPr algn="l">
               <a:lnSpc>
-                <a:spcPct val="135000"/>
+                <a:spcPct val="118000"/>
               </a:lnSpc>
             </a:pPr>
             <a:r>
-              <a:rPr sz="1500" b="1" i="0">
+              <a:rPr sz="2400" b="1" i="0">
                 <a:solidFill>
                   <a:srgbClr val="0D7A6F"/>
                 </a:solidFill>
                 <a:latin typeface="Verdana"/>
               </a:rPr>
-              <a:t>3</a:t>
-            </a:r>
-          </a:p>
-        </p:txBody>
-      </p:sp>
-      <p:sp>
-        <p:nvSpPr>
-          <p:cNvPr id="19" name="TextBox 18"/>
+              <a:t>Épeler ou noter</a:t>
+            </a:r>
+          </a:p>
+        </p:txBody>
+      </p:sp>
+      <p:sp>
+        <p:nvSpPr>
+          <p:cNvPr id="18" name="TextBox 17"/>
           <p:cNvSpPr txBox="1"/>
           <p:nvPr/>
         </p:nvSpPr>
         <p:spPr>
           <a:xfrm>
-            <a:off x="1344168" y="4524248"/>
-            <a:ext cx="10097719" cy="374396"/>
+            <a:off x="6498183" y="4716780"/>
+            <a:ext cx="4806543" cy="1089660"/>
           </a:xfrm>
           <a:prstGeom prst="rect">
             <a:avLst/>
@@ -5348,17 +5372,17 @@
           <a:p>
             <a:pPr algn="l">
               <a:lnSpc>
-                <a:spcPct val="140000"/>
+                <a:spcPct val="142000"/>
               </a:lnSpc>
             </a:pPr>
             <a:r>
-              <a:rPr sz="1900" b="0" i="0">
+              <a:rPr sz="1800" b="0" i="0">
                 <a:solidFill>
                   <a:srgbClr val="3A3D40"/>
                 </a:solidFill>
                 <a:latin typeface="Verdana"/>
               </a:rPr>
-              <a:t>« Venez vendredi à huit heures et quart. »</a:t>
+              <a:t>« Un instant, je note. » Personne ne raccroche parce que vous notez.</a:t>
             </a:r>
           </a:p>
         </p:txBody>
@@ -5535,7 +5559,7 @@
                 </a:solidFill>
                 <a:latin typeface="Verdana"/>
               </a:rPr>
-              <a:t>CORRECTION</a:t>
+              <a:t>PRATIQUE · 3 DE 4</a:t>
             </a:r>
           </a:p>
         </p:txBody>
@@ -5613,7 +5637,7 @@
                 </a:solidFill>
                 <a:latin typeface="Verdana"/>
               </a:rPr>
-              <a:t>Correction — on lit la réponse, on ne commente pas l'erreur.</a:t>
+              <a:t>Reformulez pour vérifier.</a:t>
             </a:r>
           </a:p>
         </p:txBody>
@@ -5635,7 +5659,7 @@
             </a:avLst>
           </a:prstGeom>
           <a:solidFill>
-            <a:srgbClr val="E6F5EE"/>
+            <a:srgbClr val="FFFFFF"/>
           </a:solidFill>
           <a:ln w="12700">
             <a:solidFill>
@@ -5781,16 +5805,7 @@
                 </a:solidFill>
                 <a:latin typeface="Verdana"/>
               </a:rPr>
-              <a:t>« Le docteur Tremblay est libre jeudi à onze heures. »   </a:t>
-            </a:r>
-            <a:r>
-              <a:rPr sz="1900" b="1" i="0">
-                <a:solidFill>
-                  <a:srgbClr val="07734A"/>
-                </a:solidFill>
-                <a:latin typeface="Verdana"/>
-              </a:rPr>
-              <a:t>» Donc c'est bien jeudi 11 h avec le docteur Tremblay ?</a:t>
+              <a:t>« Le docteur Tremblay est libre jeudi à onze heures. »</a:t>
             </a:r>
           </a:p>
         </p:txBody>
@@ -5812,7 +5827,7 @@
             </a:avLst>
           </a:prstGeom>
           <a:solidFill>
-            <a:srgbClr val="E6F5EE"/>
+            <a:srgbClr val="FFFFFF"/>
           </a:solidFill>
           <a:ln w="12700">
             <a:solidFill>
@@ -5958,16 +5973,7 @@
                 </a:solidFill>
                 <a:latin typeface="Verdana"/>
               </a:rPr>
-              <a:t>« On vous attend mardi à quatorze heures trente. »   </a:t>
-            </a:r>
-            <a:r>
-              <a:rPr sz="1900" b="1" i="0">
-                <a:solidFill>
-                  <a:srgbClr val="07734A"/>
-                </a:solidFill>
-                <a:latin typeface="Verdana"/>
-              </a:rPr>
-              <a:t>» Donc mardi, deux heures et demie de l'après-midi ?</a:t>
+              <a:t>« On vous attend mardi à quatorze heures trente. »</a:t>
             </a:r>
           </a:p>
         </p:txBody>
@@ -5989,7 +5995,7 @@
             </a:avLst>
           </a:prstGeom>
           <a:solidFill>
-            <a:srgbClr val="E6F5EE"/>
+            <a:srgbClr val="FFFFFF"/>
           </a:solidFill>
           <a:ln w="12700">
             <a:solidFill>
@@ -6135,16 +6141,7 @@
                 </a:solidFill>
                 <a:latin typeface="Verdana"/>
               </a:rPr>
-              <a:t>« Venez vendredi à huit heures et quart. »   </a:t>
-            </a:r>
-            <a:r>
-              <a:rPr sz="1900" b="1" i="0">
-                <a:solidFill>
-                  <a:srgbClr val="07734A"/>
-                </a:solidFill>
-                <a:latin typeface="Verdana"/>
-              </a:rPr>
-              <a:t>» Donc vendredi matin, 8 h 15 ?</a:t>
+              <a:t>« Venez vendredi à huit heures et quart. »</a:t>
             </a:r>
           </a:p>
         </p:txBody>
@@ -6321,7 +6318,7 @@
                 </a:solidFill>
                 <a:latin typeface="Verdana"/>
               </a:rPr>
-              <a:t>PRATIQUE · 4 DE 4</a:t>
+              <a:t>CORRECTION</a:t>
             </a:r>
           </a:p>
         </p:txBody>
@@ -6360,7 +6357,7 @@
                 </a:solidFill>
                 <a:latin typeface="Verdana"/>
               </a:rPr>
-              <a:t>Au téléphone, à deux</a:t>
+              <a:t>Confirmez le rendez-vous</a:t>
             </a:r>
           </a:p>
         </p:txBody>
@@ -6399,7 +6396,7 @@
                 </a:solidFill>
                 <a:latin typeface="Verdana"/>
               </a:rPr>
-              <a:t>Dos à dos, sans se voir — comme au téléphone.</a:t>
+              <a:t>Correction — on lit la réponse, on ne commente pas l'erreur.</a:t>
             </a:r>
           </a:p>
         </p:txBody>
@@ -6413,15 +6410,15 @@
         <p:spPr>
           <a:xfrm>
             <a:off x="566928" y="2139696"/>
-            <a:ext cx="11057839" cy="648716"/>
+            <a:ext cx="11057839" cy="986535"/>
           </a:xfrm>
           <a:prstGeom prst="roundRect">
             <a:avLst>
-              <a:gd name="adj" fmla="val 22552"/>
+              <a:gd name="adj" fmla="val 14830"/>
             </a:avLst>
           </a:prstGeom>
           <a:solidFill>
-            <a:srgbClr val="FFFFFF"/>
+            <a:srgbClr val="E6F5EE"/>
           </a:solidFill>
           <a:ln w="12700">
             <a:solidFill>
@@ -6458,7 +6455,7 @@
         </p:nvSpPr>
         <p:spPr>
           <a:xfrm>
-            <a:off x="841247" y="2281174"/>
+            <a:off x="841247" y="2450083"/>
             <a:ext cx="365760" cy="365760"/>
           </a:xfrm>
           <a:prstGeom prst="roundRect">
@@ -6502,7 +6499,7 @@
         </p:nvSpPr>
         <p:spPr>
           <a:xfrm>
-            <a:off x="841247" y="2345182"/>
+            <a:off x="841247" y="2514091"/>
             <a:ext cx="365760" cy="256032"/>
           </a:xfrm>
           <a:prstGeom prst="rect">
@@ -6542,7 +6539,7 @@
         <p:spPr>
           <a:xfrm>
             <a:off x="1344168" y="2295144"/>
-            <a:ext cx="10097719" cy="374396"/>
+            <a:ext cx="10097719" cy="712215"/>
           </a:xfrm>
           <a:prstGeom prst="rect">
             <a:avLst/>
@@ -6567,7 +6564,16 @@
                 </a:solidFill>
                 <a:latin typeface="Verdana"/>
               </a:rPr>
-              <a:t>L'un propose</a:t>
+              <a:t>« Le docteur Tremblay est libre jeudi à onze heures. »   </a:t>
+            </a:r>
+            <a:r>
+              <a:rPr sz="1900" b="1" i="0">
+                <a:solidFill>
+                  <a:srgbClr val="07734A"/>
+                </a:solidFill>
+                <a:latin typeface="Verdana"/>
+              </a:rPr>
+              <a:t>» Donc c'est bien jeudi 11 h avec le docteur Tremblay ?</a:t>
             </a:r>
           </a:p>
         </p:txBody>
@@ -6580,16 +6586,16 @@
         </p:nvSpPr>
         <p:spPr>
           <a:xfrm>
-            <a:off x="566928" y="2916428"/>
-            <a:ext cx="11057839" cy="648716"/>
+            <a:off x="566928" y="3254248"/>
+            <a:ext cx="11057839" cy="986535"/>
           </a:xfrm>
           <a:prstGeom prst="roundRect">
             <a:avLst>
-              <a:gd name="adj" fmla="val 22552"/>
+              <a:gd name="adj" fmla="val 14830"/>
             </a:avLst>
           </a:prstGeom>
           <a:solidFill>
-            <a:srgbClr val="FFFFFF"/>
+            <a:srgbClr val="E6F5EE"/>
           </a:solidFill>
           <a:ln w="12700">
             <a:solidFill>
@@ -6626,7 +6632,7 @@
         </p:nvSpPr>
         <p:spPr>
           <a:xfrm>
-            <a:off x="841247" y="3057905"/>
+            <a:off x="841247" y="3564635"/>
             <a:ext cx="365760" cy="365760"/>
           </a:xfrm>
           <a:prstGeom prst="roundRect">
@@ -6670,7 +6676,7 @@
         </p:nvSpPr>
         <p:spPr>
           <a:xfrm>
-            <a:off x="841247" y="3121913"/>
+            <a:off x="841247" y="3628643"/>
             <a:ext cx="365760" cy="256032"/>
           </a:xfrm>
           <a:prstGeom prst="rect">
@@ -6709,8 +6715,8 @@
         </p:nvSpPr>
         <p:spPr>
           <a:xfrm>
-            <a:off x="1344168" y="3071876"/>
-            <a:ext cx="10097719" cy="374396"/>
+            <a:off x="1344168" y="3409696"/>
+            <a:ext cx="10097719" cy="712215"/>
           </a:xfrm>
           <a:prstGeom prst="rect">
             <a:avLst/>
@@ -6735,7 +6741,16 @@
                 </a:solidFill>
                 <a:latin typeface="Verdana"/>
               </a:rPr>
-              <a:t>L'autre choisit</a:t>
+              <a:t>« On vous attend mardi à quatorze heures trente. »   </a:t>
+            </a:r>
+            <a:r>
+              <a:rPr sz="1900" b="1" i="0">
+                <a:solidFill>
+                  <a:srgbClr val="07734A"/>
+                </a:solidFill>
+                <a:latin typeface="Verdana"/>
+              </a:rPr>
+              <a:t>» Donc mardi, deux heures et demie de l'après-midi ?</a:t>
             </a:r>
           </a:p>
         </p:txBody>
@@ -6748,7 +6763,7 @@
         </p:nvSpPr>
         <p:spPr>
           <a:xfrm>
-            <a:off x="566928" y="3693160"/>
+            <a:off x="566928" y="4368800"/>
             <a:ext cx="11057839" cy="648716"/>
           </a:xfrm>
           <a:prstGeom prst="roundRect">
@@ -6757,7 +6772,7 @@
             </a:avLst>
           </a:prstGeom>
           <a:solidFill>
-            <a:srgbClr val="FFFFFF"/>
+            <a:srgbClr val="E6F5EE"/>
           </a:solidFill>
           <a:ln w="12700">
             <a:solidFill>
@@ -6794,7 +6809,7 @@
         </p:nvSpPr>
         <p:spPr>
           <a:xfrm>
-            <a:off x="841247" y="3834638"/>
+            <a:off x="841247" y="4510278"/>
             <a:ext cx="365760" cy="365760"/>
           </a:xfrm>
           <a:prstGeom prst="roundRect">
@@ -6838,7 +6853,7 @@
         </p:nvSpPr>
         <p:spPr>
           <a:xfrm>
-            <a:off x="841247" y="3898646"/>
+            <a:off x="841247" y="4574286"/>
             <a:ext cx="365760" cy="256032"/>
           </a:xfrm>
           <a:prstGeom prst="rect">
@@ -6877,7 +6892,7 @@
         </p:nvSpPr>
         <p:spPr>
           <a:xfrm>
-            <a:off x="1344168" y="3848608"/>
+            <a:off x="1344168" y="4524248"/>
             <a:ext cx="10097719" cy="374396"/>
           </a:xfrm>
           <a:prstGeom prst="rect">
@@ -6903,175 +6918,16 @@
                 </a:solidFill>
                 <a:latin typeface="Verdana"/>
               </a:rPr>
-              <a:t>Puis il confirme</a:t>
-            </a:r>
-          </a:p>
-        </p:txBody>
-      </p:sp>
-      <p:sp>
-        <p:nvSpPr>
-          <p:cNvPr id="20" name="Rounded Rectangle 19"/>
-          <p:cNvSpPr/>
-          <p:nvPr/>
-        </p:nvSpPr>
-        <p:spPr>
-          <a:xfrm>
-            <a:off x="566928" y="4469892"/>
-            <a:ext cx="11057839" cy="648716"/>
-          </a:xfrm>
-          <a:prstGeom prst="roundRect">
-            <a:avLst>
-              <a:gd name="adj" fmla="val 22552"/>
-            </a:avLst>
-          </a:prstGeom>
-          <a:solidFill>
-            <a:srgbClr val="FFFFFF"/>
-          </a:solidFill>
-          <a:ln w="12700">
-            <a:solidFill>
-              <a:srgbClr val="EAEAE8"/>
-            </a:solidFill>
-          </a:ln>
-          <a:effectLst/>
-        </p:spPr>
-        <p:style>
-          <a:lnRef idx="1">
-            <a:schemeClr val="accent1"/>
-          </a:lnRef>
-          <a:fillRef idx="3">
-            <a:schemeClr val="accent1"/>
-          </a:fillRef>
-          <a:effectRef idx="2">
-            <a:schemeClr val="accent1"/>
-          </a:effectRef>
-          <a:fontRef idx="minor">
-            <a:schemeClr val="lt1"/>
-          </a:fontRef>
-        </p:style>
-        <p:txBody>
-          <a:bodyPr rtlCol="0" anchor="ctr"/>
-          <a:lstStyle/>
-          <a:p/>
-        </p:txBody>
-      </p:sp>
-      <p:sp>
-        <p:nvSpPr>
-          <p:cNvPr id="21" name="Rounded Rectangle 20"/>
-          <p:cNvSpPr/>
-          <p:nvPr/>
-        </p:nvSpPr>
-        <p:spPr>
-          <a:xfrm>
-            <a:off x="841247" y="4611370"/>
-            <a:ext cx="365760" cy="365760"/>
-          </a:xfrm>
-          <a:prstGeom prst="roundRect">
-            <a:avLst>
-              <a:gd name="adj" fmla="val 32500"/>
-            </a:avLst>
-          </a:prstGeom>
-          <a:solidFill>
-            <a:srgbClr val="DCF2EF"/>
-          </a:solidFill>
-          <a:ln>
-            <a:noFill/>
-          </a:ln>
-          <a:effectLst/>
-        </p:spPr>
-        <p:style>
-          <a:lnRef idx="1">
-            <a:schemeClr val="accent1"/>
-          </a:lnRef>
-          <a:fillRef idx="3">
-            <a:schemeClr val="accent1"/>
-          </a:fillRef>
-          <a:effectRef idx="2">
-            <a:schemeClr val="accent1"/>
-          </a:effectRef>
-          <a:fontRef idx="minor">
-            <a:schemeClr val="lt1"/>
-          </a:fontRef>
-        </p:style>
-        <p:txBody>
-          <a:bodyPr rtlCol="0" anchor="ctr"/>
-          <a:lstStyle/>
-          <a:p/>
-        </p:txBody>
-      </p:sp>
-      <p:sp>
-        <p:nvSpPr>
-          <p:cNvPr id="22" name="TextBox 21"/>
-          <p:cNvSpPr txBox="1"/>
-          <p:nvPr/>
-        </p:nvSpPr>
-        <p:spPr>
-          <a:xfrm>
-            <a:off x="841247" y="4675378"/>
-            <a:ext cx="365760" cy="256032"/>
-          </a:xfrm>
-          <a:prstGeom prst="rect">
-            <a:avLst/>
-          </a:prstGeom>
-          <a:noFill/>
-        </p:spPr>
-        <p:txBody>
-          <a:bodyPr wrap="square" lIns="0" rIns="0" tIns="0" bIns="0" anchor="t">
-            <a:spAutoFit/>
-          </a:bodyPr>
-          <a:lstStyle/>
-          <a:p>
-            <a:pPr algn="ctr">
-              <a:lnSpc>
-                <a:spcPct val="135000"/>
-              </a:lnSpc>
-            </a:pPr>
-            <a:r>
-              <a:rPr sz="1500" b="1" i="0">
-                <a:solidFill>
-                  <a:srgbClr val="0D7A6F"/>
-                </a:solidFill>
-                <a:latin typeface="Verdana"/>
-              </a:rPr>
-              <a:t>4</a:t>
-            </a:r>
-          </a:p>
-        </p:txBody>
-      </p:sp>
-      <p:sp>
-        <p:nvSpPr>
-          <p:cNvPr id="23" name="TextBox 22"/>
-          <p:cNvSpPr txBox="1"/>
-          <p:nvPr/>
-        </p:nvSpPr>
-        <p:spPr>
-          <a:xfrm>
-            <a:off x="1344168" y="4625340"/>
-            <a:ext cx="10097719" cy="374396"/>
-          </a:xfrm>
-          <a:prstGeom prst="rect">
-            <a:avLst/>
-          </a:prstGeom>
-          <a:noFill/>
-        </p:spPr>
-        <p:txBody>
-          <a:bodyPr wrap="square" lIns="0" rIns="0" tIns="0" bIns="0" anchor="t">
-            <a:spAutoFit/>
-          </a:bodyPr>
-          <a:lstStyle/>
-          <a:p>
-            <a:pPr algn="l">
-              <a:lnSpc>
-                <a:spcPct val="140000"/>
-              </a:lnSpc>
-            </a:pPr>
-            <a:r>
-              <a:rPr sz="1900" b="0" i="0">
-                <a:solidFill>
-                  <a:srgbClr val="3A3D40"/>
-                </a:solidFill>
-                <a:latin typeface="Verdana"/>
-              </a:rPr>
-              <a:t>On échange</a:t>
+              <a:t>« Venez vendredi à huit heures et quart. »   </a:t>
+            </a:r>
+            <a:r>
+              <a:rPr sz="1900" b="1" i="0">
+                <a:solidFill>
+                  <a:srgbClr val="07734A"/>
+                </a:solidFill>
+                <a:latin typeface="Verdana"/>
+              </a:rPr>
+              <a:t>» Donc vendredi matin, 8 h 15 ?</a:t>
             </a:r>
           </a:p>
         </p:txBody>
@@ -7216,6 +7072,933 @@
       </p:sp>
       <p:sp>
         <p:nvSpPr>
+          <p:cNvPr id="5" name="TextBox 4"/>
+          <p:cNvSpPr txBox="1"/>
+          <p:nvPr/>
+        </p:nvSpPr>
+        <p:spPr>
+          <a:xfrm>
+            <a:off x="566928" y="420624"/>
+            <a:ext cx="11057839" cy="237744"/>
+          </a:xfrm>
+          <a:prstGeom prst="rect">
+            <a:avLst/>
+          </a:prstGeom>
+          <a:noFill/>
+        </p:spPr>
+        <p:txBody>
+          <a:bodyPr wrap="square" lIns="0" rIns="0" tIns="0" bIns="0" anchor="t">
+            <a:spAutoFit/>
+          </a:bodyPr>
+          <a:lstStyle/>
+          <a:p>
+            <a:pPr algn="l">
+              <a:lnSpc>
+                <a:spcPct val="135000"/>
+              </a:lnSpc>
+            </a:pPr>
+            <a:r>
+              <a:rPr sz="1300" b="1" i="0" spc="156">
+                <a:solidFill>
+                  <a:srgbClr val="0D7A6F"/>
+                </a:solidFill>
+                <a:latin typeface="Verdana"/>
+              </a:rPr>
+              <a:t>PRATIQUE · 4 DE 4</a:t>
+            </a:r>
+          </a:p>
+        </p:txBody>
+      </p:sp>
+      <p:sp>
+        <p:nvSpPr>
+          <p:cNvPr id="6" name="TextBox 5"/>
+          <p:cNvSpPr txBox="1"/>
+          <p:nvPr/>
+        </p:nvSpPr>
+        <p:spPr>
+          <a:xfrm>
+            <a:off x="566928" y="749808"/>
+            <a:ext cx="11057839" cy="877824"/>
+          </a:xfrm>
+          <a:prstGeom prst="rect">
+            <a:avLst/>
+          </a:prstGeom>
+          <a:noFill/>
+        </p:spPr>
+        <p:txBody>
+          <a:bodyPr wrap="square" lIns="0" rIns="0" tIns="0" bIns="0" anchor="t">
+            <a:spAutoFit/>
+          </a:bodyPr>
+          <a:lstStyle/>
+          <a:p>
+            <a:pPr algn="l">
+              <a:lnSpc>
+                <a:spcPct val="115000"/>
+              </a:lnSpc>
+            </a:pPr>
+            <a:r>
+              <a:rPr sz="3400" b="1" i="0">
+                <a:solidFill>
+                  <a:srgbClr val="17181A"/>
+                </a:solidFill>
+                <a:latin typeface="Verdana"/>
+              </a:rPr>
+              <a:t>Au téléphone, à deux</a:t>
+            </a:r>
+          </a:p>
+        </p:txBody>
+      </p:sp>
+      <p:sp>
+        <p:nvSpPr>
+          <p:cNvPr id="7" name="TextBox 6"/>
+          <p:cNvSpPr txBox="1"/>
+          <p:nvPr/>
+        </p:nvSpPr>
+        <p:spPr>
+          <a:xfrm>
+            <a:off x="566928" y="1645920"/>
+            <a:ext cx="11057839" cy="329184"/>
+          </a:xfrm>
+          <a:prstGeom prst="rect">
+            <a:avLst/>
+          </a:prstGeom>
+          <a:noFill/>
+        </p:spPr>
+        <p:txBody>
+          <a:bodyPr wrap="square" lIns="0" rIns="0" tIns="0" bIns="0" anchor="t">
+            <a:spAutoFit/>
+          </a:bodyPr>
+          <a:lstStyle/>
+          <a:p>
+            <a:pPr algn="l">
+              <a:lnSpc>
+                <a:spcPct val="135000"/>
+              </a:lnSpc>
+            </a:pPr>
+            <a:r>
+              <a:rPr sz="1800" b="0" i="0">
+                <a:solidFill>
+                  <a:srgbClr val="6E7175"/>
+                </a:solidFill>
+                <a:latin typeface="Verdana"/>
+              </a:rPr>
+              <a:t>Dos à dos, sans se voir — comme au téléphone.</a:t>
+            </a:r>
+          </a:p>
+        </p:txBody>
+      </p:sp>
+      <p:sp>
+        <p:nvSpPr>
+          <p:cNvPr id="8" name="Rounded Rectangle 7"/>
+          <p:cNvSpPr/>
+          <p:nvPr/>
+        </p:nvSpPr>
+        <p:spPr>
+          <a:xfrm>
+            <a:off x="566928" y="2139696"/>
+            <a:ext cx="11057839" cy="648716"/>
+          </a:xfrm>
+          <a:prstGeom prst="roundRect">
+            <a:avLst>
+              <a:gd name="adj" fmla="val 22552"/>
+            </a:avLst>
+          </a:prstGeom>
+          <a:solidFill>
+            <a:srgbClr val="FFFFFF"/>
+          </a:solidFill>
+          <a:ln w="12700">
+            <a:solidFill>
+              <a:srgbClr val="EAEAE8"/>
+            </a:solidFill>
+          </a:ln>
+          <a:effectLst/>
+        </p:spPr>
+        <p:style>
+          <a:lnRef idx="1">
+            <a:schemeClr val="accent1"/>
+          </a:lnRef>
+          <a:fillRef idx="3">
+            <a:schemeClr val="accent1"/>
+          </a:fillRef>
+          <a:effectRef idx="2">
+            <a:schemeClr val="accent1"/>
+          </a:effectRef>
+          <a:fontRef idx="minor">
+            <a:schemeClr val="lt1"/>
+          </a:fontRef>
+        </p:style>
+        <p:txBody>
+          <a:bodyPr rtlCol="0" anchor="ctr"/>
+          <a:lstStyle/>
+          <a:p/>
+        </p:txBody>
+      </p:sp>
+      <p:sp>
+        <p:nvSpPr>
+          <p:cNvPr id="9" name="Rounded Rectangle 8"/>
+          <p:cNvSpPr/>
+          <p:nvPr/>
+        </p:nvSpPr>
+        <p:spPr>
+          <a:xfrm>
+            <a:off x="841247" y="2281174"/>
+            <a:ext cx="365760" cy="365760"/>
+          </a:xfrm>
+          <a:prstGeom prst="roundRect">
+            <a:avLst>
+              <a:gd name="adj" fmla="val 32500"/>
+            </a:avLst>
+          </a:prstGeom>
+          <a:solidFill>
+            <a:srgbClr val="DCF2EF"/>
+          </a:solidFill>
+          <a:ln>
+            <a:noFill/>
+          </a:ln>
+          <a:effectLst/>
+        </p:spPr>
+        <p:style>
+          <a:lnRef idx="1">
+            <a:schemeClr val="accent1"/>
+          </a:lnRef>
+          <a:fillRef idx="3">
+            <a:schemeClr val="accent1"/>
+          </a:fillRef>
+          <a:effectRef idx="2">
+            <a:schemeClr val="accent1"/>
+          </a:effectRef>
+          <a:fontRef idx="minor">
+            <a:schemeClr val="lt1"/>
+          </a:fontRef>
+        </p:style>
+        <p:txBody>
+          <a:bodyPr rtlCol="0" anchor="ctr"/>
+          <a:lstStyle/>
+          <a:p/>
+        </p:txBody>
+      </p:sp>
+      <p:sp>
+        <p:nvSpPr>
+          <p:cNvPr id="10" name="TextBox 9"/>
+          <p:cNvSpPr txBox="1"/>
+          <p:nvPr/>
+        </p:nvSpPr>
+        <p:spPr>
+          <a:xfrm>
+            <a:off x="841247" y="2345182"/>
+            <a:ext cx="365760" cy="256032"/>
+          </a:xfrm>
+          <a:prstGeom prst="rect">
+            <a:avLst/>
+          </a:prstGeom>
+          <a:noFill/>
+        </p:spPr>
+        <p:txBody>
+          <a:bodyPr wrap="square" lIns="0" rIns="0" tIns="0" bIns="0" anchor="t">
+            <a:spAutoFit/>
+          </a:bodyPr>
+          <a:lstStyle/>
+          <a:p>
+            <a:pPr algn="ctr">
+              <a:lnSpc>
+                <a:spcPct val="135000"/>
+              </a:lnSpc>
+            </a:pPr>
+            <a:r>
+              <a:rPr sz="1500" b="1" i="0">
+                <a:solidFill>
+                  <a:srgbClr val="0D7A6F"/>
+                </a:solidFill>
+                <a:latin typeface="Verdana"/>
+              </a:rPr>
+              <a:t>1</a:t>
+            </a:r>
+          </a:p>
+        </p:txBody>
+      </p:sp>
+      <p:sp>
+        <p:nvSpPr>
+          <p:cNvPr id="11" name="TextBox 10"/>
+          <p:cNvSpPr txBox="1"/>
+          <p:nvPr/>
+        </p:nvSpPr>
+        <p:spPr>
+          <a:xfrm>
+            <a:off x="1344168" y="2295144"/>
+            <a:ext cx="10097719" cy="374396"/>
+          </a:xfrm>
+          <a:prstGeom prst="rect">
+            <a:avLst/>
+          </a:prstGeom>
+          <a:noFill/>
+        </p:spPr>
+        <p:txBody>
+          <a:bodyPr wrap="square" lIns="0" rIns="0" tIns="0" bIns="0" anchor="t">
+            <a:spAutoFit/>
+          </a:bodyPr>
+          <a:lstStyle/>
+          <a:p>
+            <a:pPr algn="l">
+              <a:lnSpc>
+                <a:spcPct val="140000"/>
+              </a:lnSpc>
+            </a:pPr>
+            <a:r>
+              <a:rPr sz="1900" b="0" i="0">
+                <a:solidFill>
+                  <a:srgbClr val="3A3D40"/>
+                </a:solidFill>
+                <a:latin typeface="Verdana"/>
+              </a:rPr>
+              <a:t>L'un propose</a:t>
+            </a:r>
+          </a:p>
+        </p:txBody>
+      </p:sp>
+      <p:sp>
+        <p:nvSpPr>
+          <p:cNvPr id="12" name="Rounded Rectangle 11"/>
+          <p:cNvSpPr/>
+          <p:nvPr/>
+        </p:nvSpPr>
+        <p:spPr>
+          <a:xfrm>
+            <a:off x="566928" y="2916428"/>
+            <a:ext cx="11057839" cy="648716"/>
+          </a:xfrm>
+          <a:prstGeom prst="roundRect">
+            <a:avLst>
+              <a:gd name="adj" fmla="val 22552"/>
+            </a:avLst>
+          </a:prstGeom>
+          <a:solidFill>
+            <a:srgbClr val="FFFFFF"/>
+          </a:solidFill>
+          <a:ln w="12700">
+            <a:solidFill>
+              <a:srgbClr val="EAEAE8"/>
+            </a:solidFill>
+          </a:ln>
+          <a:effectLst/>
+        </p:spPr>
+        <p:style>
+          <a:lnRef idx="1">
+            <a:schemeClr val="accent1"/>
+          </a:lnRef>
+          <a:fillRef idx="3">
+            <a:schemeClr val="accent1"/>
+          </a:fillRef>
+          <a:effectRef idx="2">
+            <a:schemeClr val="accent1"/>
+          </a:effectRef>
+          <a:fontRef idx="minor">
+            <a:schemeClr val="lt1"/>
+          </a:fontRef>
+        </p:style>
+        <p:txBody>
+          <a:bodyPr rtlCol="0" anchor="ctr"/>
+          <a:lstStyle/>
+          <a:p/>
+        </p:txBody>
+      </p:sp>
+      <p:sp>
+        <p:nvSpPr>
+          <p:cNvPr id="13" name="Rounded Rectangle 12"/>
+          <p:cNvSpPr/>
+          <p:nvPr/>
+        </p:nvSpPr>
+        <p:spPr>
+          <a:xfrm>
+            <a:off x="841247" y="3057905"/>
+            <a:ext cx="365760" cy="365760"/>
+          </a:xfrm>
+          <a:prstGeom prst="roundRect">
+            <a:avLst>
+              <a:gd name="adj" fmla="val 32500"/>
+            </a:avLst>
+          </a:prstGeom>
+          <a:solidFill>
+            <a:srgbClr val="DCF2EF"/>
+          </a:solidFill>
+          <a:ln>
+            <a:noFill/>
+          </a:ln>
+          <a:effectLst/>
+        </p:spPr>
+        <p:style>
+          <a:lnRef idx="1">
+            <a:schemeClr val="accent1"/>
+          </a:lnRef>
+          <a:fillRef idx="3">
+            <a:schemeClr val="accent1"/>
+          </a:fillRef>
+          <a:effectRef idx="2">
+            <a:schemeClr val="accent1"/>
+          </a:effectRef>
+          <a:fontRef idx="minor">
+            <a:schemeClr val="lt1"/>
+          </a:fontRef>
+        </p:style>
+        <p:txBody>
+          <a:bodyPr rtlCol="0" anchor="ctr"/>
+          <a:lstStyle/>
+          <a:p/>
+        </p:txBody>
+      </p:sp>
+      <p:sp>
+        <p:nvSpPr>
+          <p:cNvPr id="14" name="TextBox 13"/>
+          <p:cNvSpPr txBox="1"/>
+          <p:nvPr/>
+        </p:nvSpPr>
+        <p:spPr>
+          <a:xfrm>
+            <a:off x="841247" y="3121913"/>
+            <a:ext cx="365760" cy="256032"/>
+          </a:xfrm>
+          <a:prstGeom prst="rect">
+            <a:avLst/>
+          </a:prstGeom>
+          <a:noFill/>
+        </p:spPr>
+        <p:txBody>
+          <a:bodyPr wrap="square" lIns="0" rIns="0" tIns="0" bIns="0" anchor="t">
+            <a:spAutoFit/>
+          </a:bodyPr>
+          <a:lstStyle/>
+          <a:p>
+            <a:pPr algn="ctr">
+              <a:lnSpc>
+                <a:spcPct val="135000"/>
+              </a:lnSpc>
+            </a:pPr>
+            <a:r>
+              <a:rPr sz="1500" b="1" i="0">
+                <a:solidFill>
+                  <a:srgbClr val="0D7A6F"/>
+                </a:solidFill>
+                <a:latin typeface="Verdana"/>
+              </a:rPr>
+              <a:t>2</a:t>
+            </a:r>
+          </a:p>
+        </p:txBody>
+      </p:sp>
+      <p:sp>
+        <p:nvSpPr>
+          <p:cNvPr id="15" name="TextBox 14"/>
+          <p:cNvSpPr txBox="1"/>
+          <p:nvPr/>
+        </p:nvSpPr>
+        <p:spPr>
+          <a:xfrm>
+            <a:off x="1344168" y="3071876"/>
+            <a:ext cx="10097719" cy="374396"/>
+          </a:xfrm>
+          <a:prstGeom prst="rect">
+            <a:avLst/>
+          </a:prstGeom>
+          <a:noFill/>
+        </p:spPr>
+        <p:txBody>
+          <a:bodyPr wrap="square" lIns="0" rIns="0" tIns="0" bIns="0" anchor="t">
+            <a:spAutoFit/>
+          </a:bodyPr>
+          <a:lstStyle/>
+          <a:p>
+            <a:pPr algn="l">
+              <a:lnSpc>
+                <a:spcPct val="140000"/>
+              </a:lnSpc>
+            </a:pPr>
+            <a:r>
+              <a:rPr sz="1900" b="0" i="0">
+                <a:solidFill>
+                  <a:srgbClr val="3A3D40"/>
+                </a:solidFill>
+                <a:latin typeface="Verdana"/>
+              </a:rPr>
+              <a:t>L'autre choisit</a:t>
+            </a:r>
+          </a:p>
+        </p:txBody>
+      </p:sp>
+      <p:sp>
+        <p:nvSpPr>
+          <p:cNvPr id="16" name="Rounded Rectangle 15"/>
+          <p:cNvSpPr/>
+          <p:nvPr/>
+        </p:nvSpPr>
+        <p:spPr>
+          <a:xfrm>
+            <a:off x="566928" y="3693160"/>
+            <a:ext cx="11057839" cy="648716"/>
+          </a:xfrm>
+          <a:prstGeom prst="roundRect">
+            <a:avLst>
+              <a:gd name="adj" fmla="val 22552"/>
+            </a:avLst>
+          </a:prstGeom>
+          <a:solidFill>
+            <a:srgbClr val="FFFFFF"/>
+          </a:solidFill>
+          <a:ln w="12700">
+            <a:solidFill>
+              <a:srgbClr val="EAEAE8"/>
+            </a:solidFill>
+          </a:ln>
+          <a:effectLst/>
+        </p:spPr>
+        <p:style>
+          <a:lnRef idx="1">
+            <a:schemeClr val="accent1"/>
+          </a:lnRef>
+          <a:fillRef idx="3">
+            <a:schemeClr val="accent1"/>
+          </a:fillRef>
+          <a:effectRef idx="2">
+            <a:schemeClr val="accent1"/>
+          </a:effectRef>
+          <a:fontRef idx="minor">
+            <a:schemeClr val="lt1"/>
+          </a:fontRef>
+        </p:style>
+        <p:txBody>
+          <a:bodyPr rtlCol="0" anchor="ctr"/>
+          <a:lstStyle/>
+          <a:p/>
+        </p:txBody>
+      </p:sp>
+      <p:sp>
+        <p:nvSpPr>
+          <p:cNvPr id="17" name="Rounded Rectangle 16"/>
+          <p:cNvSpPr/>
+          <p:nvPr/>
+        </p:nvSpPr>
+        <p:spPr>
+          <a:xfrm>
+            <a:off x="841247" y="3834638"/>
+            <a:ext cx="365760" cy="365760"/>
+          </a:xfrm>
+          <a:prstGeom prst="roundRect">
+            <a:avLst>
+              <a:gd name="adj" fmla="val 32500"/>
+            </a:avLst>
+          </a:prstGeom>
+          <a:solidFill>
+            <a:srgbClr val="DCF2EF"/>
+          </a:solidFill>
+          <a:ln>
+            <a:noFill/>
+          </a:ln>
+          <a:effectLst/>
+        </p:spPr>
+        <p:style>
+          <a:lnRef idx="1">
+            <a:schemeClr val="accent1"/>
+          </a:lnRef>
+          <a:fillRef idx="3">
+            <a:schemeClr val="accent1"/>
+          </a:fillRef>
+          <a:effectRef idx="2">
+            <a:schemeClr val="accent1"/>
+          </a:effectRef>
+          <a:fontRef idx="minor">
+            <a:schemeClr val="lt1"/>
+          </a:fontRef>
+        </p:style>
+        <p:txBody>
+          <a:bodyPr rtlCol="0" anchor="ctr"/>
+          <a:lstStyle/>
+          <a:p/>
+        </p:txBody>
+      </p:sp>
+      <p:sp>
+        <p:nvSpPr>
+          <p:cNvPr id="18" name="TextBox 17"/>
+          <p:cNvSpPr txBox="1"/>
+          <p:nvPr/>
+        </p:nvSpPr>
+        <p:spPr>
+          <a:xfrm>
+            <a:off x="841247" y="3898646"/>
+            <a:ext cx="365760" cy="256032"/>
+          </a:xfrm>
+          <a:prstGeom prst="rect">
+            <a:avLst/>
+          </a:prstGeom>
+          <a:noFill/>
+        </p:spPr>
+        <p:txBody>
+          <a:bodyPr wrap="square" lIns="0" rIns="0" tIns="0" bIns="0" anchor="t">
+            <a:spAutoFit/>
+          </a:bodyPr>
+          <a:lstStyle/>
+          <a:p>
+            <a:pPr algn="ctr">
+              <a:lnSpc>
+                <a:spcPct val="135000"/>
+              </a:lnSpc>
+            </a:pPr>
+            <a:r>
+              <a:rPr sz="1500" b="1" i="0">
+                <a:solidFill>
+                  <a:srgbClr val="0D7A6F"/>
+                </a:solidFill>
+                <a:latin typeface="Verdana"/>
+              </a:rPr>
+              <a:t>3</a:t>
+            </a:r>
+          </a:p>
+        </p:txBody>
+      </p:sp>
+      <p:sp>
+        <p:nvSpPr>
+          <p:cNvPr id="19" name="TextBox 18"/>
+          <p:cNvSpPr txBox="1"/>
+          <p:nvPr/>
+        </p:nvSpPr>
+        <p:spPr>
+          <a:xfrm>
+            <a:off x="1344168" y="3848608"/>
+            <a:ext cx="10097719" cy="374396"/>
+          </a:xfrm>
+          <a:prstGeom prst="rect">
+            <a:avLst/>
+          </a:prstGeom>
+          <a:noFill/>
+        </p:spPr>
+        <p:txBody>
+          <a:bodyPr wrap="square" lIns="0" rIns="0" tIns="0" bIns="0" anchor="t">
+            <a:spAutoFit/>
+          </a:bodyPr>
+          <a:lstStyle/>
+          <a:p>
+            <a:pPr algn="l">
+              <a:lnSpc>
+                <a:spcPct val="140000"/>
+              </a:lnSpc>
+            </a:pPr>
+            <a:r>
+              <a:rPr sz="1900" b="0" i="0">
+                <a:solidFill>
+                  <a:srgbClr val="3A3D40"/>
+                </a:solidFill>
+                <a:latin typeface="Verdana"/>
+              </a:rPr>
+              <a:t>Puis il confirme</a:t>
+            </a:r>
+          </a:p>
+        </p:txBody>
+      </p:sp>
+      <p:sp>
+        <p:nvSpPr>
+          <p:cNvPr id="20" name="Rounded Rectangle 19"/>
+          <p:cNvSpPr/>
+          <p:nvPr/>
+        </p:nvSpPr>
+        <p:spPr>
+          <a:xfrm>
+            <a:off x="566928" y="4469892"/>
+            <a:ext cx="11057839" cy="648716"/>
+          </a:xfrm>
+          <a:prstGeom prst="roundRect">
+            <a:avLst>
+              <a:gd name="adj" fmla="val 22552"/>
+            </a:avLst>
+          </a:prstGeom>
+          <a:solidFill>
+            <a:srgbClr val="FFFFFF"/>
+          </a:solidFill>
+          <a:ln w="12700">
+            <a:solidFill>
+              <a:srgbClr val="EAEAE8"/>
+            </a:solidFill>
+          </a:ln>
+          <a:effectLst/>
+        </p:spPr>
+        <p:style>
+          <a:lnRef idx="1">
+            <a:schemeClr val="accent1"/>
+          </a:lnRef>
+          <a:fillRef idx="3">
+            <a:schemeClr val="accent1"/>
+          </a:fillRef>
+          <a:effectRef idx="2">
+            <a:schemeClr val="accent1"/>
+          </a:effectRef>
+          <a:fontRef idx="minor">
+            <a:schemeClr val="lt1"/>
+          </a:fontRef>
+        </p:style>
+        <p:txBody>
+          <a:bodyPr rtlCol="0" anchor="ctr"/>
+          <a:lstStyle/>
+          <a:p/>
+        </p:txBody>
+      </p:sp>
+      <p:sp>
+        <p:nvSpPr>
+          <p:cNvPr id="21" name="Rounded Rectangle 20"/>
+          <p:cNvSpPr/>
+          <p:nvPr/>
+        </p:nvSpPr>
+        <p:spPr>
+          <a:xfrm>
+            <a:off x="841247" y="4611370"/>
+            <a:ext cx="365760" cy="365760"/>
+          </a:xfrm>
+          <a:prstGeom prst="roundRect">
+            <a:avLst>
+              <a:gd name="adj" fmla="val 32500"/>
+            </a:avLst>
+          </a:prstGeom>
+          <a:solidFill>
+            <a:srgbClr val="DCF2EF"/>
+          </a:solidFill>
+          <a:ln>
+            <a:noFill/>
+          </a:ln>
+          <a:effectLst/>
+        </p:spPr>
+        <p:style>
+          <a:lnRef idx="1">
+            <a:schemeClr val="accent1"/>
+          </a:lnRef>
+          <a:fillRef idx="3">
+            <a:schemeClr val="accent1"/>
+          </a:fillRef>
+          <a:effectRef idx="2">
+            <a:schemeClr val="accent1"/>
+          </a:effectRef>
+          <a:fontRef idx="minor">
+            <a:schemeClr val="lt1"/>
+          </a:fontRef>
+        </p:style>
+        <p:txBody>
+          <a:bodyPr rtlCol="0" anchor="ctr"/>
+          <a:lstStyle/>
+          <a:p/>
+        </p:txBody>
+      </p:sp>
+      <p:sp>
+        <p:nvSpPr>
+          <p:cNvPr id="22" name="TextBox 21"/>
+          <p:cNvSpPr txBox="1"/>
+          <p:nvPr/>
+        </p:nvSpPr>
+        <p:spPr>
+          <a:xfrm>
+            <a:off x="841247" y="4675378"/>
+            <a:ext cx="365760" cy="256032"/>
+          </a:xfrm>
+          <a:prstGeom prst="rect">
+            <a:avLst/>
+          </a:prstGeom>
+          <a:noFill/>
+        </p:spPr>
+        <p:txBody>
+          <a:bodyPr wrap="square" lIns="0" rIns="0" tIns="0" bIns="0" anchor="t">
+            <a:spAutoFit/>
+          </a:bodyPr>
+          <a:lstStyle/>
+          <a:p>
+            <a:pPr algn="ctr">
+              <a:lnSpc>
+                <a:spcPct val="135000"/>
+              </a:lnSpc>
+            </a:pPr>
+            <a:r>
+              <a:rPr sz="1500" b="1" i="0">
+                <a:solidFill>
+                  <a:srgbClr val="0D7A6F"/>
+                </a:solidFill>
+                <a:latin typeface="Verdana"/>
+              </a:rPr>
+              <a:t>4</a:t>
+            </a:r>
+          </a:p>
+        </p:txBody>
+      </p:sp>
+      <p:sp>
+        <p:nvSpPr>
+          <p:cNvPr id="23" name="TextBox 22"/>
+          <p:cNvSpPr txBox="1"/>
+          <p:nvPr/>
+        </p:nvSpPr>
+        <p:spPr>
+          <a:xfrm>
+            <a:off x="1344168" y="4625340"/>
+            <a:ext cx="10097719" cy="374396"/>
+          </a:xfrm>
+          <a:prstGeom prst="rect">
+            <a:avLst/>
+          </a:prstGeom>
+          <a:noFill/>
+        </p:spPr>
+        <p:txBody>
+          <a:bodyPr wrap="square" lIns="0" rIns="0" tIns="0" bIns="0" anchor="t">
+            <a:spAutoFit/>
+          </a:bodyPr>
+          <a:lstStyle/>
+          <a:p>
+            <a:pPr algn="l">
+              <a:lnSpc>
+                <a:spcPct val="140000"/>
+              </a:lnSpc>
+            </a:pPr>
+            <a:r>
+              <a:rPr sz="1900" b="0" i="0">
+                <a:solidFill>
+                  <a:srgbClr val="3A3D40"/>
+                </a:solidFill>
+                <a:latin typeface="Verdana"/>
+              </a:rPr>
+              <a:t>On échange</a:t>
+            </a:r>
+          </a:p>
+        </p:txBody>
+      </p:sp>
+    </p:spTree>
+  </p:cSld>
+  <p:clrMapOvr>
+    <a:masterClrMapping/>
+  </p:clrMapOvr>
+</p:sld>
+</file>
+
+<file path=ppt/slides/slide14.xml><?xml version="1.0" encoding="utf-8"?>
+<p:sld xmlns:a="http://schemas.openxmlformats.org/drawingml/2006/main" xmlns:p="http://schemas.openxmlformats.org/presentationml/2006/main" xmlns:r="http://schemas.openxmlformats.org/officeDocument/2006/relationships">
+  <p:cSld>
+    <p:spTree>
+      <p:nvGrpSpPr>
+        <p:cNvPr id="1" name=""/>
+        <p:cNvGrpSpPr/>
+        <p:nvPr/>
+      </p:nvGrpSpPr>
+      <p:grpSpPr/>
+      <p:sp>
+        <p:nvSpPr>
+          <p:cNvPr id="2" name="Rectangle 1"/>
+          <p:cNvSpPr/>
+          <p:nvPr/>
+        </p:nvSpPr>
+        <p:spPr>
+          <a:xfrm>
+            <a:off x="0" y="0"/>
+            <a:ext cx="12191695" cy="6858000"/>
+          </a:xfrm>
+          <a:prstGeom prst="rect">
+            <a:avLst/>
+          </a:prstGeom>
+          <a:solidFill>
+            <a:srgbClr val="F7F7F5"/>
+          </a:solidFill>
+          <a:ln>
+            <a:noFill/>
+          </a:ln>
+          <a:effectLst/>
+        </p:spPr>
+        <p:style>
+          <a:lnRef idx="1">
+            <a:schemeClr val="accent1"/>
+          </a:lnRef>
+          <a:fillRef idx="3">
+            <a:schemeClr val="accent1"/>
+          </a:fillRef>
+          <a:effectRef idx="2">
+            <a:schemeClr val="accent1"/>
+          </a:effectRef>
+          <a:fontRef idx="minor">
+            <a:schemeClr val="lt1"/>
+          </a:fontRef>
+        </p:style>
+        <p:txBody>
+          <a:bodyPr rtlCol="0" anchor="ctr"/>
+          <a:lstStyle/>
+          <a:p/>
+        </p:txBody>
+      </p:sp>
+      <p:sp>
+        <p:nvSpPr>
+          <p:cNvPr id="3" name="TextBox 2"/>
+          <p:cNvSpPr txBox="1"/>
+          <p:nvPr/>
+        </p:nvSpPr>
+        <p:spPr>
+          <a:xfrm>
+            <a:off x="566928" y="6355080"/>
+            <a:ext cx="6400800" cy="219456"/>
+          </a:xfrm>
+          <a:prstGeom prst="rect">
+            <a:avLst/>
+          </a:prstGeom>
+          <a:noFill/>
+        </p:spPr>
+        <p:txBody>
+          <a:bodyPr wrap="square" lIns="0" rIns="0" tIns="0" bIns="0" anchor="t">
+            <a:spAutoFit/>
+          </a:bodyPr>
+          <a:lstStyle/>
+          <a:p>
+            <a:pPr algn="l">
+              <a:lnSpc>
+                <a:spcPct val="135000"/>
+              </a:lnSpc>
+            </a:pPr>
+            <a:r>
+              <a:rPr sz="1200" b="0" i="0">
+                <a:solidFill>
+                  <a:srgbClr val="6E7175"/>
+                </a:solidFill>
+                <a:latin typeface="Verdana"/>
+              </a:rPr>
+              <a:t>B2 · Prendre rendez-vous et aller à la pharmacie</a:t>
+            </a:r>
+          </a:p>
+        </p:txBody>
+      </p:sp>
+      <p:sp>
+        <p:nvSpPr>
+          <p:cNvPr id="4" name="TextBox 3"/>
+          <p:cNvSpPr txBox="1"/>
+          <p:nvPr/>
+        </p:nvSpPr>
+        <p:spPr>
+          <a:xfrm>
+            <a:off x="10710367" y="6355080"/>
+            <a:ext cx="914400" cy="219456"/>
+          </a:xfrm>
+          <a:prstGeom prst="rect">
+            <a:avLst/>
+          </a:prstGeom>
+          <a:noFill/>
+        </p:spPr>
+        <p:txBody>
+          <a:bodyPr wrap="square" lIns="0" rIns="0" tIns="0" bIns="0" anchor="t">
+            <a:spAutoFit/>
+          </a:bodyPr>
+          <a:lstStyle/>
+          <a:p>
+            <a:pPr algn="r">
+              <a:lnSpc>
+                <a:spcPct val="135000"/>
+              </a:lnSpc>
+            </a:pPr>
+            <a:r>
+              <a:rPr sz="1200" b="0" i="0">
+                <a:solidFill>
+                  <a:srgbClr val="6E7175"/>
+                </a:solidFill>
+                <a:latin typeface="Verdana"/>
+              </a:rPr>
+              <a:t>14</a:t>
+            </a:r>
+          </a:p>
+        </p:txBody>
+      </p:sp>
+      <p:sp>
+        <p:nvSpPr>
           <p:cNvPr id="5" name="Rectangle 4"/>
           <p:cNvSpPr/>
           <p:nvPr/>
@@ -14399,7 +15182,7 @@
                 </a:solidFill>
                 <a:latin typeface="Verdana"/>
               </a:rPr>
-              <a:t>ANALYSE</a:t>
+              <a:t>DANS L'ACTIVITÉ INTERACTIVE</a:t>
             </a:r>
           </a:p>
         </p:txBody>
@@ -14438,25 +15221,64 @@
                 </a:solidFill>
                 <a:latin typeface="Verdana"/>
               </a:rPr>
-              <a:t>Faire répéter, poliment</a:t>
-            </a:r>
-          </a:p>
-        </p:txBody>
-      </p:sp>
-      <p:sp>
-        <p:nvSpPr>
-          <p:cNvPr id="7" name="Rounded Rectangle 6"/>
+              <a:t>L'heure du rendez-vous</a:t>
+            </a:r>
+          </a:p>
+        </p:txBody>
+      </p:sp>
+      <p:sp>
+        <p:nvSpPr>
+          <p:cNvPr id="7" name="TextBox 6"/>
+          <p:cNvSpPr txBox="1"/>
+          <p:nvPr/>
+        </p:nvSpPr>
+        <p:spPr>
+          <a:xfrm>
+            <a:off x="566928" y="1645920"/>
+            <a:ext cx="11057839" cy="329184"/>
+          </a:xfrm>
+          <a:prstGeom prst="rect">
+            <a:avLst/>
+          </a:prstGeom>
+          <a:noFill/>
+        </p:spPr>
+        <p:txBody>
+          <a:bodyPr wrap="square" lIns="0" rIns="0" tIns="0" bIns="0" anchor="t">
+            <a:spAutoFit/>
+          </a:bodyPr>
+          <a:lstStyle/>
+          <a:p>
+            <a:pPr algn="l">
+              <a:lnSpc>
+                <a:spcPct val="135000"/>
+              </a:lnSpc>
+            </a:pPr>
+            <a:r>
+              <a:rPr sz="1800" b="0" i="0">
+                <a:solidFill>
+                  <a:srgbClr val="6E7175"/>
+                </a:solidFill>
+                <a:latin typeface="Verdana"/>
+              </a:rPr>
+              <a:t>L'écran que les élèves vont ouvrir. Les réponses sont encore dans le banc, à droite.</a:t>
+            </a:r>
+          </a:p>
+        </p:txBody>
+      </p:sp>
+      <p:sp>
+        <p:nvSpPr>
+          <p:cNvPr id="8" name="Rounded Rectangle 7"/>
           <p:cNvSpPr/>
           <p:nvPr/>
         </p:nvSpPr>
         <p:spPr>
           <a:xfrm>
-            <a:off x="566928" y="1810512"/>
-            <a:ext cx="5446623" cy="2052828"/>
+            <a:off x="2101436" y="2084831"/>
+            <a:ext cx="7988822" cy="4087368"/>
           </a:xfrm>
           <a:prstGeom prst="roundRect">
             <a:avLst>
-              <a:gd name="adj" fmla="val 7126"/>
+              <a:gd name="adj" fmla="val 2237"/>
             </a:avLst>
           </a:prstGeom>
           <a:solidFill>
@@ -14464,7 +15286,7 @@
           </a:solidFill>
           <a:ln w="12700">
             <a:solidFill>
-              <a:srgbClr val="EAEAE8"/>
+              <a:srgbClr val="D6D6D2"/>
             </a:solidFill>
           </a:ln>
           <a:effectLst/>
@@ -14489,456 +15311,30 @@
           <a:p/>
         </p:txBody>
       </p:sp>
-      <p:sp>
-        <p:nvSpPr>
-          <p:cNvPr id="8" name="TextBox 7"/>
-          <p:cNvSpPr txBox="1"/>
-          <p:nvPr/>
-        </p:nvSpPr>
-        <p:spPr>
-          <a:xfrm>
-            <a:off x="886968" y="2084831"/>
-            <a:ext cx="4806543" cy="387096"/>
-          </a:xfrm>
-          <a:prstGeom prst="rect">
-            <a:avLst/>
-          </a:prstGeom>
-          <a:noFill/>
-        </p:spPr>
-        <p:txBody>
-          <a:bodyPr wrap="square" lIns="0" rIns="0" tIns="0" bIns="0" anchor="t">
-            <a:spAutoFit/>
-          </a:bodyPr>
-          <a:lstStyle/>
-          <a:p>
-            <a:pPr algn="l">
-              <a:lnSpc>
-                <a:spcPct val="118000"/>
-              </a:lnSpc>
-            </a:pPr>
-            <a:r>
-              <a:rPr sz="2400" b="1" i="0">
-                <a:solidFill>
-                  <a:srgbClr val="0D7A6F"/>
-                </a:solidFill>
-                <a:latin typeface="Verdana"/>
-              </a:rPr>
-              <a:t>Demander de répéter</a:t>
-            </a:r>
-          </a:p>
-        </p:txBody>
-      </p:sp>
-      <p:sp>
-        <p:nvSpPr>
-          <p:cNvPr id="9" name="TextBox 8"/>
-          <p:cNvSpPr txBox="1"/>
-          <p:nvPr/>
-        </p:nvSpPr>
-        <p:spPr>
-          <a:xfrm>
-            <a:off x="886968" y="2499360"/>
-            <a:ext cx="4806543" cy="1089660"/>
-          </a:xfrm>
-          <a:prstGeom prst="rect">
-            <a:avLst/>
-          </a:prstGeom>
-          <a:noFill/>
-        </p:spPr>
-        <p:txBody>
-          <a:bodyPr wrap="square" lIns="0" rIns="0" tIns="0" bIns="0" anchor="t">
-            <a:spAutoFit/>
-          </a:bodyPr>
-          <a:lstStyle/>
-          <a:p>
-            <a:pPr algn="l">
-              <a:lnSpc>
-                <a:spcPct val="142000"/>
-              </a:lnSpc>
-            </a:pPr>
-            <a:r>
-              <a:rPr sz="1800" b="0" i="0">
-                <a:solidFill>
-                  <a:srgbClr val="3A3D40"/>
-                </a:solidFill>
-                <a:latin typeface="Verdana"/>
-              </a:rPr>
-              <a:t>« Pardon, pouvez-vous répéter, s'il vous plaît ? » La formule passe partout, au téléphone comme au comptoir.</a:t>
-            </a:r>
-          </a:p>
-        </p:txBody>
-      </p:sp>
-      <p:sp>
-        <p:nvSpPr>
-          <p:cNvPr id="10" name="Rounded Rectangle 9"/>
-          <p:cNvSpPr/>
-          <p:nvPr/>
-        </p:nvSpPr>
-        <p:spPr>
-          <a:xfrm>
-            <a:off x="6178143" y="1810512"/>
-            <a:ext cx="5446623" cy="2052828"/>
-          </a:xfrm>
-          <a:prstGeom prst="roundRect">
-            <a:avLst>
-              <a:gd name="adj" fmla="val 7126"/>
-            </a:avLst>
-          </a:prstGeom>
-          <a:solidFill>
-            <a:srgbClr val="FFFFFF"/>
-          </a:solidFill>
-          <a:ln w="12700">
-            <a:solidFill>
-              <a:srgbClr val="EAEAE8"/>
-            </a:solidFill>
-          </a:ln>
-          <a:effectLst/>
-        </p:spPr>
-        <p:style>
-          <a:lnRef idx="1">
-            <a:schemeClr val="accent1"/>
-          </a:lnRef>
-          <a:fillRef idx="3">
-            <a:schemeClr val="accent1"/>
-          </a:fillRef>
-          <a:effectRef idx="2">
-            <a:schemeClr val="accent1"/>
-          </a:effectRef>
-          <a:fontRef idx="minor">
-            <a:schemeClr val="lt1"/>
-          </a:fontRef>
-        </p:style>
-        <p:txBody>
-          <a:bodyPr rtlCol="0" anchor="ctr"/>
-          <a:lstStyle/>
-          <a:p/>
-        </p:txBody>
-      </p:sp>
-      <p:sp>
-        <p:nvSpPr>
-          <p:cNvPr id="11" name="TextBox 10"/>
-          <p:cNvSpPr txBox="1"/>
-          <p:nvPr/>
-        </p:nvSpPr>
-        <p:spPr>
-          <a:xfrm>
-            <a:off x="6498183" y="2084831"/>
-            <a:ext cx="4806543" cy="387096"/>
-          </a:xfrm>
-          <a:prstGeom prst="rect">
-            <a:avLst/>
-          </a:prstGeom>
-          <a:noFill/>
-        </p:spPr>
-        <p:txBody>
-          <a:bodyPr wrap="square" lIns="0" rIns="0" tIns="0" bIns="0" anchor="t">
-            <a:spAutoFit/>
-          </a:bodyPr>
-          <a:lstStyle/>
-          <a:p>
-            <a:pPr algn="l">
-              <a:lnSpc>
-                <a:spcPct val="118000"/>
-              </a:lnSpc>
-            </a:pPr>
-            <a:r>
-              <a:rPr sz="2400" b="1" i="0">
-                <a:solidFill>
-                  <a:srgbClr val="0D7A6F"/>
-                </a:solidFill>
-                <a:latin typeface="Verdana"/>
-              </a:rPr>
-              <a:t>Demander plus lentement</a:t>
-            </a:r>
-          </a:p>
-        </p:txBody>
-      </p:sp>
-      <p:sp>
-        <p:nvSpPr>
-          <p:cNvPr id="12" name="TextBox 11"/>
-          <p:cNvSpPr txBox="1"/>
-          <p:nvPr/>
-        </p:nvSpPr>
-        <p:spPr>
-          <a:xfrm>
-            <a:off x="6498183" y="2499360"/>
-            <a:ext cx="4806543" cy="1089660"/>
-          </a:xfrm>
-          <a:prstGeom prst="rect">
-            <a:avLst/>
-          </a:prstGeom>
-          <a:noFill/>
-        </p:spPr>
-        <p:txBody>
-          <a:bodyPr wrap="square" lIns="0" rIns="0" tIns="0" bIns="0" anchor="t">
-            <a:spAutoFit/>
-          </a:bodyPr>
-          <a:lstStyle/>
-          <a:p>
-            <a:pPr algn="l">
-              <a:lnSpc>
-                <a:spcPct val="142000"/>
-              </a:lnSpc>
-            </a:pPr>
-            <a:r>
-              <a:rPr sz="1800" b="0" i="0">
-                <a:solidFill>
-                  <a:srgbClr val="3A3D40"/>
-                </a:solidFill>
-                <a:latin typeface="Verdana"/>
-              </a:rPr>
-              <a:t>« Est-ce que vous pouvez parler un peu plus lentement ? » On peut le demander sans s'excuser longuement.</a:t>
-            </a:r>
-          </a:p>
-        </p:txBody>
-      </p:sp>
-      <p:sp>
-        <p:nvSpPr>
-          <p:cNvPr id="13" name="Rounded Rectangle 12"/>
-          <p:cNvSpPr/>
-          <p:nvPr/>
-        </p:nvSpPr>
-        <p:spPr>
-          <a:xfrm>
-            <a:off x="566928" y="4027932"/>
-            <a:ext cx="5446623" cy="2052828"/>
-          </a:xfrm>
-          <a:prstGeom prst="roundRect">
-            <a:avLst>
-              <a:gd name="adj" fmla="val 7126"/>
-            </a:avLst>
-          </a:prstGeom>
-          <a:solidFill>
-            <a:srgbClr val="FFFFFF"/>
-          </a:solidFill>
-          <a:ln w="12700">
-            <a:solidFill>
-              <a:srgbClr val="EAEAE8"/>
-            </a:solidFill>
-          </a:ln>
-          <a:effectLst/>
-        </p:spPr>
-        <p:style>
-          <a:lnRef idx="1">
-            <a:schemeClr val="accent1"/>
-          </a:lnRef>
-          <a:fillRef idx="3">
-            <a:schemeClr val="accent1"/>
-          </a:fillRef>
-          <a:effectRef idx="2">
-            <a:schemeClr val="accent1"/>
-          </a:effectRef>
-          <a:fontRef idx="minor">
-            <a:schemeClr val="lt1"/>
-          </a:fontRef>
-        </p:style>
-        <p:txBody>
-          <a:bodyPr rtlCol="0" anchor="ctr"/>
-          <a:lstStyle/>
-          <a:p/>
-        </p:txBody>
-      </p:sp>
-      <p:sp>
-        <p:nvSpPr>
-          <p:cNvPr id="14" name="TextBox 13"/>
-          <p:cNvSpPr txBox="1"/>
-          <p:nvPr/>
-        </p:nvSpPr>
-        <p:spPr>
-          <a:xfrm>
-            <a:off x="886968" y="4302252"/>
-            <a:ext cx="4806543" cy="387096"/>
-          </a:xfrm>
-          <a:prstGeom prst="rect">
-            <a:avLst/>
-          </a:prstGeom>
-          <a:noFill/>
-        </p:spPr>
-        <p:txBody>
-          <a:bodyPr wrap="square" lIns="0" rIns="0" tIns="0" bIns="0" anchor="t">
-            <a:spAutoFit/>
-          </a:bodyPr>
-          <a:lstStyle/>
-          <a:p>
-            <a:pPr algn="l">
-              <a:lnSpc>
-                <a:spcPct val="118000"/>
-              </a:lnSpc>
-            </a:pPr>
-            <a:r>
-              <a:rPr sz="2400" b="1" i="0">
-                <a:solidFill>
-                  <a:srgbClr val="0D7A6F"/>
-                </a:solidFill>
-                <a:latin typeface="Verdana"/>
-              </a:rPr>
-              <a:t>Vérifier ce qu'on a compris</a:t>
-            </a:r>
-          </a:p>
-        </p:txBody>
-      </p:sp>
-      <p:sp>
-        <p:nvSpPr>
-          <p:cNvPr id="15" name="TextBox 14"/>
-          <p:cNvSpPr txBox="1"/>
-          <p:nvPr/>
-        </p:nvSpPr>
-        <p:spPr>
-          <a:xfrm>
-            <a:off x="886968" y="4716780"/>
-            <a:ext cx="4806543" cy="1089660"/>
-          </a:xfrm>
-          <a:prstGeom prst="rect">
-            <a:avLst/>
-          </a:prstGeom>
-          <a:noFill/>
-        </p:spPr>
-        <p:txBody>
-          <a:bodyPr wrap="square" lIns="0" rIns="0" tIns="0" bIns="0" anchor="t">
-            <a:spAutoFit/>
-          </a:bodyPr>
-          <a:lstStyle/>
-          <a:p>
-            <a:pPr algn="l">
-              <a:lnSpc>
-                <a:spcPct val="142000"/>
-              </a:lnSpc>
-            </a:pPr>
-            <a:r>
-              <a:rPr sz="1800" b="0" i="0">
-                <a:solidFill>
-                  <a:srgbClr val="3A3D40"/>
-                </a:solidFill>
-                <a:latin typeface="Verdana"/>
-              </a:rPr>
-              <a:t>« Donc c'est bien jeudi à onze heures ? » La meilleure des trois : elle confirme au lieu de redemander.</a:t>
-            </a:r>
-          </a:p>
-        </p:txBody>
-      </p:sp>
-      <p:sp>
-        <p:nvSpPr>
-          <p:cNvPr id="16" name="Rounded Rectangle 15"/>
-          <p:cNvSpPr/>
-          <p:nvPr/>
-        </p:nvSpPr>
-        <p:spPr>
-          <a:xfrm>
-            <a:off x="6178143" y="4027932"/>
-            <a:ext cx="5446623" cy="2052828"/>
-          </a:xfrm>
-          <a:prstGeom prst="roundRect">
-            <a:avLst>
-              <a:gd name="adj" fmla="val 7126"/>
-            </a:avLst>
-          </a:prstGeom>
-          <a:solidFill>
-            <a:srgbClr val="FFFFFF"/>
-          </a:solidFill>
-          <a:ln w="12700">
-            <a:solidFill>
-              <a:srgbClr val="EAEAE8"/>
-            </a:solidFill>
-          </a:ln>
-          <a:effectLst/>
-        </p:spPr>
-        <p:style>
-          <a:lnRef idx="1">
-            <a:schemeClr val="accent1"/>
-          </a:lnRef>
-          <a:fillRef idx="3">
-            <a:schemeClr val="accent1"/>
-          </a:fillRef>
-          <a:effectRef idx="2">
-            <a:schemeClr val="accent1"/>
-          </a:effectRef>
-          <a:fontRef idx="minor">
-            <a:schemeClr val="lt1"/>
-          </a:fontRef>
-        </p:style>
-        <p:txBody>
-          <a:bodyPr rtlCol="0" anchor="ctr"/>
-          <a:lstStyle/>
-          <a:p/>
-        </p:txBody>
-      </p:sp>
-      <p:sp>
-        <p:nvSpPr>
-          <p:cNvPr id="17" name="TextBox 16"/>
-          <p:cNvSpPr txBox="1"/>
-          <p:nvPr/>
-        </p:nvSpPr>
-        <p:spPr>
-          <a:xfrm>
-            <a:off x="6498183" y="4302252"/>
-            <a:ext cx="4806543" cy="387096"/>
-          </a:xfrm>
-          <a:prstGeom prst="rect">
-            <a:avLst/>
-          </a:prstGeom>
-          <a:noFill/>
-        </p:spPr>
-        <p:txBody>
-          <a:bodyPr wrap="square" lIns="0" rIns="0" tIns="0" bIns="0" anchor="t">
-            <a:spAutoFit/>
-          </a:bodyPr>
-          <a:lstStyle/>
-          <a:p>
-            <a:pPr algn="l">
-              <a:lnSpc>
-                <a:spcPct val="118000"/>
-              </a:lnSpc>
-            </a:pPr>
-            <a:r>
-              <a:rPr sz="2400" b="1" i="0">
-                <a:solidFill>
-                  <a:srgbClr val="0D7A6F"/>
-                </a:solidFill>
-                <a:latin typeface="Verdana"/>
-              </a:rPr>
-              <a:t>Épeler ou noter</a:t>
-            </a:r>
-          </a:p>
-        </p:txBody>
-      </p:sp>
-      <p:sp>
-        <p:nvSpPr>
-          <p:cNvPr id="18" name="TextBox 17"/>
-          <p:cNvSpPr txBox="1"/>
-          <p:nvPr/>
-        </p:nvSpPr>
-        <p:spPr>
-          <a:xfrm>
-            <a:off x="6498183" y="4716780"/>
-            <a:ext cx="4806543" cy="1089660"/>
-          </a:xfrm>
-          <a:prstGeom prst="rect">
-            <a:avLst/>
-          </a:prstGeom>
-          <a:noFill/>
-        </p:spPr>
-        <p:txBody>
-          <a:bodyPr wrap="square" lIns="0" rIns="0" tIns="0" bIns="0" anchor="t">
-            <a:spAutoFit/>
-          </a:bodyPr>
-          <a:lstStyle/>
-          <a:p>
-            <a:pPr algn="l">
-              <a:lnSpc>
-                <a:spcPct val="142000"/>
-              </a:lnSpc>
-            </a:pPr>
-            <a:r>
-              <a:rPr sz="1800" b="0" i="0">
-                <a:solidFill>
-                  <a:srgbClr val="3A3D40"/>
-                </a:solidFill>
-                <a:latin typeface="Verdana"/>
-              </a:rPr>
-              <a:t>« Un instant, je note. » Personne ne raccroche parce que vous notez.</a:t>
-            </a:r>
-          </a:p>
-        </p:txBody>
-      </p:sp>
+      <p:pic>
+        <p:nvPicPr>
+          <p:cNvPr id="9" name="Picture 8" descr="co2.png"/>
+          <p:cNvPicPr>
+            <a:picLocks noChangeAspect="1"/>
+          </p:cNvPicPr>
+          <p:nvPr/>
+        </p:nvPicPr>
+        <p:blipFill>
+          <a:blip r:embed="rId2"/>
+          <a:stretch>
+            <a:fillRect/>
+          </a:stretch>
+        </p:blipFill>
+        <p:spPr>
+          <a:xfrm>
+            <a:off x="2119724" y="2103120"/>
+            <a:ext cx="7952246" cy="4050792"/>
+          </a:xfrm>
+          <a:prstGeom prst="rect">
+            <a:avLst/>
+          </a:prstGeom>
+        </p:spPr>
+      </p:pic>
     </p:spTree>
   </p:cSld>
   <p:clrMapOvr>
